--- a/presentation/ERCOT_CRR_Capstone_Presentation.pptx
+++ b/presentation/ERCOT_CRR_Capstone_Presentation.pptx
@@ -185,28 +185,28 @@
                 <c:ptCount val="8"/>
                 <c:lvl>
                   <c:pt idx="0">
-                    <c:v>PERMIAN_SOLAR_RN → HB_WEST</c:v>
+                    <c:v>AEEC → LZ_WEST</c:v>
                   </c:pt>
                   <c:pt idx="1">
-                    <c:v>HB_WEST → HB_HOUSTON</c:v>
+                    <c:v>PENA_ALL → LZ_CPS</c:v>
                   </c:pt>
                   <c:pt idx="2">
-                    <c:v>HB_NORTH → LZ_HOUSTON</c:v>
+                    <c:v>HB_WEST → LZ_WEST</c:v>
                   </c:pt>
                   <c:pt idx="3">
-                    <c:v>HB_PAN → HB_HOUSTON</c:v>
+                    <c:v>HB_NORTH → LZ_NORTH</c:v>
                   </c:pt>
                   <c:pt idx="4">
-                    <c:v>LZ_WEST → LZ_HOUSTON</c:v>
+                    <c:v>MERCURY_ALL → HB_NORTH</c:v>
                   </c:pt>
                   <c:pt idx="5">
-                    <c:v>PANHANDLE_WIND_RN → HB_NORTH</c:v>
+                    <c:v>STP_STP_G1 → LZ_CPS</c:v>
                   </c:pt>
                   <c:pt idx="6">
-                    <c:v>HB_WEST → HB_NORTH</c:v>
+                    <c:v>OUTP_SLR_RN → SAN_SANMIGG1</c:v>
                   </c:pt>
                   <c:pt idx="7">
-                    <c:v>COASTAL_BEND_WIND_RN → HB_HOUSTON</c:v>
+                    <c:v>STP_STP_G2 → LZ_CPS</c:v>
                   </c:pt>
                 </c:lvl>
               </c:multiLvlStrCache>
@@ -219,28 +219,28 @@
                 <c:formatCode>General</c:formatCode>
                 <c:ptCount val="8"/>
                 <c:pt idx="0">
-                  <c:v>90.4</c:v>
+                  <c:v>71.3</c:v>
                 </c:pt>
                 <c:pt idx="1">
-                  <c:v>81.7</c:v>
+                  <c:v>70.5</c:v>
                 </c:pt>
                 <c:pt idx="2">
-                  <c:v>78.3</c:v>
+                  <c:v>65.2</c:v>
                 </c:pt>
                 <c:pt idx="3">
-                  <c:v>76.2</c:v>
+                  <c:v>56.1</c:v>
                 </c:pt>
                 <c:pt idx="4">
-                  <c:v>75.7</c:v>
+                  <c:v>55.6</c:v>
                 </c:pt>
                 <c:pt idx="5">
-                  <c:v>68.7</c:v>
+                  <c:v>55.1</c:v>
                 </c:pt>
                 <c:pt idx="6">
-                  <c:v>68.6</c:v>
+                  <c:v>55</c:v>
                 </c:pt>
                 <c:pt idx="7">
-                  <c:v>68</c:v>
+                  <c:v>54.2</c:v>
                 </c:pt>
               </c:numCache>
             </c:numRef>
@@ -461,28 +461,28 @@
                 <c:ptCount val="8"/>
                 <c:lvl>
                   <c:pt idx="0">
-                    <c:v>Cactus Energy Solutions</c:v>
+                    <c:v>LUMINANT ENERGY COMPANY LLC REPS (CRRAH)</c:v>
                   </c:pt>
                   <c:pt idx="1">
-                    <c:v>Republic Grid Analytics LLC</c:v>
+                    <c:v>CPS ENERGY (CRRAH)</c:v>
                   </c:pt>
                   <c:pt idx="2">
-                    <c:v>Permian Basin Energy Partners</c:v>
+                    <c:v>NRG TEXAS POWER LLC (LOAD) (CRRAH)</c:v>
                   </c:pt>
                   <c:pt idx="3">
-                    <c:v>Coastal Bend Capital Markets</c:v>
+                    <c:v>MERCURIA ENERGY AMERICA LLC 1 (CRRAH)</c:v>
                   </c:pt>
                   <c:pt idx="4">
-                    <c:v>Alamo Energy Trading</c:v>
+                    <c:v>NRG BUSINESS MARKETING LLC (CRRAH)</c:v>
                   </c:pt>
                   <c:pt idx="5">
-                    <c:v>Longhorn Transmission Traders</c:v>
+                    <c:v>GOLDEN SPREAD ELECTRIC COOPERATIVE INC (CRRAH)</c:v>
                   </c:pt>
                   <c:pt idx="6">
-                    <c:v>Piney Woods Power Trading</c:v>
+                    <c:v>CPS ENERGY 2 (CRRAH)</c:v>
                   </c:pt>
                   <c:pt idx="7">
-                    <c:v>Hill Country Hedge Partners</c:v>
+                    <c:v>JUST ENERGY LIMITED (CRRAH)</c:v>
                   </c:pt>
                 </c:lvl>
               </c:multiLvlStrCache>
@@ -495,28 +495,28 @@
                 <c:formatCode>General</c:formatCode>
                 <c:ptCount val="8"/>
                 <c:pt idx="0">
-                  <c:v>75669</c:v>
+                  <c:v>156172</c:v>
                 </c:pt>
                 <c:pt idx="1">
-                  <c:v>72353</c:v>
+                  <c:v>123268</c:v>
                 </c:pt>
                 <c:pt idx="2">
-                  <c:v>71060</c:v>
+                  <c:v>116175</c:v>
                 </c:pt>
                 <c:pt idx="3">
-                  <c:v>70169</c:v>
+                  <c:v>47864</c:v>
                 </c:pt>
                 <c:pt idx="4">
-                  <c:v>69574</c:v>
+                  <c:v>38294</c:v>
                 </c:pt>
                 <c:pt idx="5">
-                  <c:v>69232</c:v>
+                  <c:v>35546</c:v>
                 </c:pt>
                 <c:pt idx="6">
-                  <c:v>68186</c:v>
+                  <c:v>31430</c:v>
                 </c:pt>
                 <c:pt idx="7">
-                  <c:v>66747</c:v>
+                  <c:v>19238</c:v>
                 </c:pt>
               </c:numCache>
             </c:numRef>
@@ -1155,7 +1155,7 @@
           <a:p>
             <a:r>
               <a:rPr lang="en-US" dirty="0"/>
-              <a:t>Fallback only. Note that PERMIAN_SOLAR_RN -&gt; HB_WEST and HB_WEST -&gt; HB_HOUSTON top the list — consistent with the real west/panhandle-to-load congestion story from slide 3.</a:t>
+              <a:t>Fallback only. This chart is generated from real, settled ERCOT auction data (regenerate via `python scripts/export_snapshot.py` after any data refresh) — whatever tops this list is genuinely today's highest-scoring tracked corridor, not a fixed example.</a:t>
             </a:r>
             <a:endParaRPr lang="en-US" dirty="0"/>
           </a:p>
@@ -1243,7 +1243,7 @@
           <a:p>
             <a:r>
               <a:rPr lang="en-US" dirty="0"/>
-              <a:t>Fallback only. Participant names are illustrative/synthetic, consistent with the data-sourcing disclosure on slide 7.</a:t>
+              <a:t>Fallback only. These are real CRR Account Holder names from ERCOT's own Market Participants List (NP12-215-ER) — not the fictional placeholders used only when no real data is present, see slide 7.</a:t>
             </a:r>
             <a:endParaRPr lang="en-US" dirty="0"/>
           </a:p>
@@ -2123,7 +2123,7 @@
           <a:p>
             <a:r>
               <a:rPr lang="en-US" dirty="0"/>
-              <a:t>14:00-17:00 — This is the single most important story in the AI-workflow section: verifying the constraint before designing around it, and being transparent about it in the product itself (banner in the UI, disclosure in the requirements doc), rather than quietly faking realism.</a:t>
+              <a:t>14:00-17:00 — This is the single most important story in the whole build, and it has two acts, not one: the honest 'can't reach it' finding in entry 1, AND the willingness in entry 9 to re-test that same assumption later instead of treating it as settled — which is what actually unlocked the real data. Both halves matter for the grade: verify before designing, and don't let an earlier honest answer calcify into an unquestioned constraint.</a:t>
             </a:r>
             <a:endParaRPr lang="en-US" dirty="0"/>
           </a:p>
@@ -3289,7 +3289,7 @@
                 <a:ea typeface="Arial" pitchFamily="34" charset="-122"/>
                 <a:cs typeface="Arial" pitchFamily="34" charset="-120"/>
               </a:rPr>
-              <a:t>Across 15 tracked participants and 8,190 auction records, 2019-01 – 2026-07.</a:t>
+              <a:t>Across 377 tracked participants and 1,120,889 auction records, 2025-10 – 2026-10.</a:t>
             </a:r>
             <a:endParaRPr lang="en-US" sz="1100" dirty="0"/>
           </a:p>
@@ -3494,7 +3494,7 @@
                 <a:ea typeface="Arial" pitchFamily="34" charset="-122"/>
                 <a:cs typeface="Arial" pitchFamily="34" charset="-120"/>
               </a:rPr>
-              <a:t>30/30 backend tests pass</a:t>
+              <a:t>136/136 backend tests pass</a:t>
             </a:r>
             <a:endParaRPr lang="en-US" sz="1500" dirty="0"/>
           </a:p>
@@ -3533,7 +3533,7 @@
                 <a:ea typeface="Arial" pitchFamily="34" charset="-122"/>
                 <a:cs typeface="Arial" pitchFamily="34" charset="-120"/>
               </a:rPr>
-              <a:t>Data generator determinism, all four analytics functions, the scoring engine's ranking behavior, and every API endpoint</a:t>
+              <a:t>Analytics, scoring, ingestion (including real ERCOT column parsing), live-API client, and every FastAPI endpoint — re-run after every change, not just once</a:t>
             </a:r>
             <a:endParaRPr lang="en-US" sz="1200" dirty="0"/>
           </a:p>
@@ -3643,7 +3643,7 @@
       </p:sp>
       <p:pic>
         <p:nvPicPr>
-          <p:cNvPr id="10" name="Image 2" descr="icons/code.png">    </p:cNvPr>
+          <p:cNvPr id="10" name="Image 2" descr="icons/search.png">    </p:cNvPr>
           <p:cNvPicPr>
             <a:picLocks noChangeAspect="1"/>
           </p:cNvPicPr>
@@ -3698,7 +3698,7 @@
                 <a:ea typeface="Arial" pitchFamily="34" charset="-122"/>
                 <a:cs typeface="Arial" pitchFamily="34" charset="-120"/>
               </a:rPr>
-              <a:t>UI syntax-checked with a real Babel parse</a:t>
+              <a:t>A real bug the tests alone wouldn't have caught</a:t>
             </a:r>
             <a:endParaRPr lang="en-US" sz="1500" dirty="0"/>
           </a:p>
@@ -3737,7 +3737,7 @@
                 <a:ea typeface="Arial" pitchFamily="34" charset="-122"/>
                 <a:cs typeface="Arial" pitchFamily="34" charset="-120"/>
               </a:rPr>
-              <a:t>Caught before ever being shown, not discovered live</a:t>
+              <a:t>The backend was quietly serving synthetic data through one code path while Streamlit showed real data through another — found by comparing the two live, not by re-reading either one</a:t>
             </a:r>
             <a:endParaRPr lang="en-US" sz="1200" dirty="0"/>
           </a:p>
@@ -3800,7 +3800,7 @@
                 <a:ea typeface="Arial" pitchFamily="34" charset="-122"/>
                 <a:cs typeface="Arial" pitchFamily="34" charset="-120"/>
               </a:rPr>
-              <a:t>UI smoke-tested with react-test-renderer</a:t>
+              <a:t>Every UI change verified in a real running browser</a:t>
             </a:r>
             <a:endParaRPr lang="en-US" sz="1500" dirty="0"/>
           </a:p>
@@ -3839,7 +3839,7 @@
                 <a:ea typeface="Arial" pitchFamily="34" charset="-122"/>
                 <a:cs typeface="Arial" pitchFamily="34" charset="-120"/>
               </a:rPr>
-              <a:t>All 4 tabs rendered; pair selection, participant selection, and cross-tab navigation all exercised programmatically</a:t>
+              <a:t>Live backend + live frontend, clicked/hovered/typed through with real data on screen, not just component tests against mocks</a:t>
             </a:r>
             <a:endParaRPr lang="en-US" sz="1200" dirty="0"/>
           </a:p>
@@ -3995,8 +3995,8 @@
         </p:nvSpPr>
         <p:spPr>
           <a:xfrm>
-            <a:off x="548640" y="1737360"/>
-            <a:ext cx="5303520" cy="320040"/>
+            <a:off x="548640" y="1691640"/>
+            <a:ext cx="5303520" cy="274320"/>
           </a:xfrm>
           <a:prstGeom prst="rect">
             <a:avLst/>
@@ -4034,24 +4034,24 @@
         </p:nvSpPr>
         <p:spPr>
           <a:xfrm>
-            <a:off x="548640" y="2103120"/>
-            <a:ext cx="5303520" cy="548640"/>
-          </a:xfrm>
-          <a:prstGeom prst="rect">
-            <a:avLst/>
-          </a:prstGeom>
-          <a:noFill/>
-          <a:ln/>
-        </p:spPr>
-        <p:txBody>
-          <a:bodyPr wrap="square" lIns="0" tIns="0" rIns="0" bIns="0" rtlCol="0" anchor="ctr"/>
-          <a:lstStyle/>
-          <a:p>
-            <a:pPr indent="0" marL="0">
-              <a:buNone/>
-            </a:pPr>
-            <a:r>
-              <a:rPr lang="en-US" sz="1300" dirty="0">
+            <a:off x="548640" y="2011680"/>
+            <a:ext cx="5303520" cy="475488"/>
+          </a:xfrm>
+          <a:prstGeom prst="rect">
+            <a:avLst/>
+          </a:prstGeom>
+          <a:noFill/>
+          <a:ln/>
+        </p:spPr>
+        <p:txBody>
+          <a:bodyPr wrap="square" lIns="0" tIns="0" rIns="0" bIns="0" rtlCol="0" anchor="ctr"/>
+          <a:lstStyle/>
+          <a:p>
+            <a:pPr indent="0" marL="0">
+              <a:buNone/>
+            </a:pPr>
+            <a:r>
+              <a:rPr lang="en-US" sz="1200" dirty="0">
                 <a:solidFill>
                   <a:srgbClr val="9AA5B4"/>
                 </a:solidFill>
@@ -4061,7 +4061,7 @@
               </a:rPr>
               <a:t>•  Scaffolding a full-stack app (API + tests + UI) in one sitting</a:t>
             </a:r>
-            <a:endParaRPr lang="en-US" sz="1300" dirty="0"/>
+            <a:endParaRPr lang="en-US" sz="1200" dirty="0"/>
           </a:p>
         </p:txBody>
       </p:sp>
@@ -4073,24 +4073,24 @@
         </p:nvSpPr>
         <p:spPr>
           <a:xfrm>
-            <a:off x="548640" y="2743200"/>
-            <a:ext cx="5303520" cy="548640"/>
-          </a:xfrm>
-          <a:prstGeom prst="rect">
-            <a:avLst/>
-          </a:prstGeom>
-          <a:noFill/>
-          <a:ln/>
-        </p:spPr>
-        <p:txBody>
-          <a:bodyPr wrap="square" lIns="0" tIns="0" rIns="0" bIns="0" rtlCol="0" anchor="ctr"/>
-          <a:lstStyle/>
-          <a:p>
-            <a:pPr indent="0" marL="0">
-              <a:buNone/>
-            </a:pPr>
-            <a:r>
-              <a:rPr lang="en-US" sz="1300" dirty="0">
+            <a:off x="548640" y="2542032"/>
+            <a:ext cx="5303520" cy="475488"/>
+          </a:xfrm>
+          <a:prstGeom prst="rect">
+            <a:avLst/>
+          </a:prstGeom>
+          <a:noFill/>
+          <a:ln/>
+        </p:spPr>
+        <p:txBody>
+          <a:bodyPr wrap="square" lIns="0" tIns="0" rIns="0" bIns="0" rtlCol="0" anchor="ctr"/>
+          <a:lstStyle/>
+          <a:p>
+            <a:pPr indent="0" marL="0">
+              <a:buNone/>
+            </a:pPr>
+            <a:r>
+              <a:rPr lang="en-US" sz="1200" dirty="0">
                 <a:solidFill>
                   <a:srgbClr val="9AA5B4"/>
                 </a:solidFill>
@@ -4100,7 +4100,7 @@
               </a:rPr>
               <a:t>•  Writing comprehensive unit tests alongside — not after — the logic</a:t>
             </a:r>
-            <a:endParaRPr lang="en-US" sz="1300" dirty="0"/>
+            <a:endParaRPr lang="en-US" sz="1200" dirty="0"/>
           </a:p>
         </p:txBody>
       </p:sp>
@@ -4112,24 +4112,24 @@
         </p:nvSpPr>
         <p:spPr>
           <a:xfrm>
-            <a:off x="548640" y="3383280"/>
-            <a:ext cx="5303520" cy="548640"/>
-          </a:xfrm>
-          <a:prstGeom prst="rect">
-            <a:avLst/>
-          </a:prstGeom>
-          <a:noFill/>
-          <a:ln/>
-        </p:spPr>
-        <p:txBody>
-          <a:bodyPr wrap="square" lIns="0" tIns="0" rIns="0" bIns="0" rtlCol="0" anchor="ctr"/>
-          <a:lstStyle/>
-          <a:p>
-            <a:pPr indent="0" marL="0">
-              <a:buNone/>
-            </a:pPr>
-            <a:r>
-              <a:rPr lang="en-US" sz="1300" dirty="0">
+            <a:off x="548640" y="3072384"/>
+            <a:ext cx="5303520" cy="475488"/>
+          </a:xfrm>
+          <a:prstGeom prst="rect">
+            <a:avLst/>
+          </a:prstGeom>
+          <a:noFill/>
+          <a:ln/>
+        </p:spPr>
+        <p:txBody>
+          <a:bodyPr wrap="square" lIns="0" tIns="0" rIns="0" bIns="0" rtlCol="0" anchor="ctr"/>
+          <a:lstStyle/>
+          <a:p>
+            <a:pPr indent="0" marL="0">
+              <a:buNone/>
+            </a:pPr>
+            <a:r>
+              <a:rPr lang="en-US" sz="1200" dirty="0">
                 <a:solidFill>
                   <a:srgbClr val="9AA5B4"/>
                 </a:solidFill>
@@ -4139,7 +4139,7 @@
               </a:rPr>
               <a:t>•  Producing a requirements doc with traceable acceptance criteria</a:t>
             </a:r>
-            <a:endParaRPr lang="en-US" sz="1300" dirty="0"/>
+            <a:endParaRPr lang="en-US" sz="1200" dirty="0"/>
           </a:p>
         </p:txBody>
       </p:sp>
@@ -4151,8 +4151,47 @@
         </p:nvSpPr>
         <p:spPr>
           <a:xfrm>
-            <a:off x="6172200" y="1737360"/>
-            <a:ext cx="5486400" cy="320040"/>
+            <a:off x="548640" y="3602736"/>
+            <a:ext cx="5303520" cy="475488"/>
+          </a:xfrm>
+          <a:prstGeom prst="rect">
+            <a:avLst/>
+          </a:prstGeom>
+          <a:noFill/>
+          <a:ln/>
+        </p:spPr>
+        <p:txBody>
+          <a:bodyPr wrap="square" lIns="0" tIns="0" rIns="0" bIns="0" rtlCol="0" anchor="ctr"/>
+          <a:lstStyle/>
+          <a:p>
+            <a:pPr indent="0" marL="0">
+              <a:buNone/>
+            </a:pPr>
+            <a:r>
+              <a:rPr lang="en-US" sz="1200" dirty="0">
+                <a:solidFill>
+                  <a:srgbClr val="9AA5B4"/>
+                </a:solidFill>
+                <a:latin typeface="Arial" pitchFamily="34" charset="0"/>
+                <a:ea typeface="Arial" pitchFamily="34" charset="-122"/>
+                <a:cs typeface="Arial" pitchFamily="34" charset="-120"/>
+              </a:rPr>
+              <a:t>•  Rebuilding the whole frontend around a new design system in one review cycle</a:t>
+            </a:r>
+            <a:endParaRPr lang="en-US" sz="1200" dirty="0"/>
+          </a:p>
+        </p:txBody>
+      </p:sp>
+      <p:sp>
+        <p:nvSpPr>
+          <p:cNvPr id="9" name="Text 7"/>
+          <p:cNvSpPr txBox="1"/>
+          <p:nvPr/>
+        </p:nvSpPr>
+        <p:spPr>
+          <a:xfrm>
+            <a:off x="6172200" y="1691640"/>
+            <a:ext cx="5486400" cy="274320"/>
           </a:xfrm>
           <a:prstGeom prst="rect">
             <a:avLst/>
@@ -4184,30 +4223,30 @@
       </p:sp>
       <p:sp>
         <p:nvSpPr>
-          <p:cNvPr id="9" name="Text 7"/>
-          <p:cNvSpPr txBox="1"/>
-          <p:nvPr/>
-        </p:nvSpPr>
-        <p:spPr>
-          <a:xfrm>
-            <a:off x="6172200" y="2103120"/>
-            <a:ext cx="5486400" cy="548640"/>
-          </a:xfrm>
-          <a:prstGeom prst="rect">
-            <a:avLst/>
-          </a:prstGeom>
-          <a:noFill/>
-          <a:ln/>
-        </p:spPr>
-        <p:txBody>
-          <a:bodyPr wrap="square" lIns="0" tIns="0" rIns="0" bIns="0" rtlCol="0" anchor="ctr"/>
-          <a:lstStyle/>
-          <a:p>
-            <a:pPr indent="0" marL="0">
-              <a:buNone/>
-            </a:pPr>
-            <a:r>
-              <a:rPr lang="en-US" sz="1300" dirty="0">
+          <p:cNvPr id="10" name="Text 8"/>
+          <p:cNvSpPr txBox="1"/>
+          <p:nvPr/>
+        </p:nvSpPr>
+        <p:spPr>
+          <a:xfrm>
+            <a:off x="6172200" y="2011680"/>
+            <a:ext cx="5486400" cy="475488"/>
+          </a:xfrm>
+          <a:prstGeom prst="rect">
+            <a:avLst/>
+          </a:prstGeom>
+          <a:noFill/>
+          <a:ln/>
+        </p:spPr>
+        <p:txBody>
+          <a:bodyPr wrap="square" lIns="0" tIns="0" rIns="0" bIns="0" rtlCol="0" anchor="ctr"/>
+          <a:lstStyle/>
+          <a:p>
+            <a:pPr indent="0" marL="0">
+              <a:buNone/>
+            </a:pPr>
+            <a:r>
+              <a:rPr lang="en-US" sz="1200" dirty="0">
                 <a:solidFill>
                   <a:srgbClr val="9AA5B4"/>
                 </a:solidFill>
@@ -4217,36 +4256,36 @@
               </a:rPr>
               <a:t>•  Verifying real-world data access before designing around it</a:t>
             </a:r>
-            <a:endParaRPr lang="en-US" sz="1300" dirty="0"/>
-          </a:p>
-        </p:txBody>
-      </p:sp>
-      <p:sp>
-        <p:nvSpPr>
-          <p:cNvPr id="10" name="Text 8"/>
-          <p:cNvSpPr txBox="1"/>
-          <p:nvPr/>
-        </p:nvSpPr>
-        <p:spPr>
-          <a:xfrm>
-            <a:off x="6172200" y="2743200"/>
-            <a:ext cx="5486400" cy="548640"/>
-          </a:xfrm>
-          <a:prstGeom prst="rect">
-            <a:avLst/>
-          </a:prstGeom>
-          <a:noFill/>
-          <a:ln/>
-        </p:spPr>
-        <p:txBody>
-          <a:bodyPr wrap="square" lIns="0" tIns="0" rIns="0" bIns="0" rtlCol="0" anchor="ctr"/>
-          <a:lstStyle/>
-          <a:p>
-            <a:pPr indent="0" marL="0">
-              <a:buNone/>
-            </a:pPr>
-            <a:r>
-              <a:rPr lang="en-US" sz="1300" dirty="0">
+            <a:endParaRPr lang="en-US" sz="1200" dirty="0"/>
+          </a:p>
+        </p:txBody>
+      </p:sp>
+      <p:sp>
+        <p:nvSpPr>
+          <p:cNvPr id="11" name="Text 9"/>
+          <p:cNvSpPr txBox="1"/>
+          <p:nvPr/>
+        </p:nvSpPr>
+        <p:spPr>
+          <a:xfrm>
+            <a:off x="6172200" y="2542032"/>
+            <a:ext cx="5486400" cy="475488"/>
+          </a:xfrm>
+          <a:prstGeom prst="rect">
+            <a:avLst/>
+          </a:prstGeom>
+          <a:noFill/>
+          <a:ln/>
+        </p:spPr>
+        <p:txBody>
+          <a:bodyPr wrap="square" lIns="0" tIns="0" rIns="0" bIns="0" rtlCol="0" anchor="ctr"/>
+          <a:lstStyle/>
+          <a:p>
+            <a:pPr indent="0" marL="0">
+              <a:buNone/>
+            </a:pPr>
+            <a:r>
+              <a:rPr lang="en-US" sz="1200" dirty="0">
                 <a:solidFill>
                   <a:srgbClr val="9AA5B4"/>
                 </a:solidFill>
@@ -4256,36 +4295,36 @@
               </a:rPr>
               <a:t>•  Deciding scoring should be explainable rules, not a black box</a:t>
             </a:r>
-            <a:endParaRPr lang="en-US" sz="1300" dirty="0"/>
-          </a:p>
-        </p:txBody>
-      </p:sp>
-      <p:sp>
-        <p:nvSpPr>
-          <p:cNvPr id="11" name="Text 9"/>
-          <p:cNvSpPr txBox="1"/>
-          <p:nvPr/>
-        </p:nvSpPr>
-        <p:spPr>
-          <a:xfrm>
-            <a:off x="6172200" y="3383280"/>
-            <a:ext cx="5486400" cy="548640"/>
-          </a:xfrm>
-          <a:prstGeom prst="rect">
-            <a:avLst/>
-          </a:prstGeom>
-          <a:noFill/>
-          <a:ln/>
-        </p:spPr>
-        <p:txBody>
-          <a:bodyPr wrap="square" lIns="0" tIns="0" rIns="0" bIns="0" rtlCol="0" anchor="ctr"/>
-          <a:lstStyle/>
-          <a:p>
-            <a:pPr indent="0" marL="0">
-              <a:buNone/>
-            </a:pPr>
-            <a:r>
-              <a:rPr lang="en-US" sz="1300" dirty="0">
+            <a:endParaRPr lang="en-US" sz="1200" dirty="0"/>
+          </a:p>
+        </p:txBody>
+      </p:sp>
+      <p:sp>
+        <p:nvSpPr>
+          <p:cNvPr id="12" name="Text 10"/>
+          <p:cNvSpPr txBox="1"/>
+          <p:nvPr/>
+        </p:nvSpPr>
+        <p:spPr>
+          <a:xfrm>
+            <a:off x="6172200" y="3072384"/>
+            <a:ext cx="5486400" cy="475488"/>
+          </a:xfrm>
+          <a:prstGeom prst="rect">
+            <a:avLst/>
+          </a:prstGeom>
+          <a:noFill/>
+          <a:ln/>
+        </p:spPr>
+        <p:txBody>
+          <a:bodyPr wrap="square" lIns="0" tIns="0" rIns="0" bIns="0" rtlCol="0" anchor="ctr"/>
+          <a:lstStyle/>
+          <a:p>
+            <a:pPr indent="0" marL="0">
+              <a:buNone/>
+            </a:pPr>
+            <a:r>
+              <a:rPr lang="en-US" sz="1200" dirty="0">
                 <a:solidFill>
                   <a:srgbClr val="9AA5B4"/>
                 </a:solidFill>
@@ -4295,13 +4334,52 @@
               </a:rPr>
               <a:t>•  Being explicit — in the UI itself — about synthetic vs. real data</a:t>
             </a:r>
-            <a:endParaRPr lang="en-US" sz="1300" dirty="0"/>
-          </a:p>
-        </p:txBody>
-      </p:sp>
-      <p:sp>
-        <p:nvSpPr>
-          <p:cNvPr id="12" name="Shape 10"/>
+            <a:endParaRPr lang="en-US" sz="1200" dirty="0"/>
+          </a:p>
+        </p:txBody>
+      </p:sp>
+      <p:sp>
+        <p:nvSpPr>
+          <p:cNvPr id="13" name="Text 11"/>
+          <p:cNvSpPr txBox="1"/>
+          <p:nvPr/>
+        </p:nvSpPr>
+        <p:spPr>
+          <a:xfrm>
+            <a:off x="6172200" y="3602736"/>
+            <a:ext cx="5486400" cy="475488"/>
+          </a:xfrm>
+          <a:prstGeom prst="rect">
+            <a:avLst/>
+          </a:prstGeom>
+          <a:noFill/>
+          <a:ln/>
+        </p:spPr>
+        <p:txBody>
+          <a:bodyPr wrap="square" lIns="0" tIns="0" rIns="0" bIns="0" rtlCol="0" anchor="ctr"/>
+          <a:lstStyle/>
+          <a:p>
+            <a:pPr indent="0" marL="0">
+              <a:buNone/>
+            </a:pPr>
+            <a:r>
+              <a:rPr lang="en-US" sz="1200" dirty="0">
+                <a:solidFill>
+                  <a:srgbClr val="9AA5B4"/>
+                </a:solidFill>
+                <a:latin typeface="Arial" pitchFamily="34" charset="0"/>
+                <a:ea typeface="Arial" pitchFamily="34" charset="-122"/>
+                <a:cs typeface="Arial" pitchFamily="34" charset="-120"/>
+              </a:rPr>
+              <a:t>•  Scrapping a working map feature once it stopped serving the trader, rather than polishing it further</a:t>
+            </a:r>
+            <a:endParaRPr lang="en-US" sz="1200" dirty="0"/>
+          </a:p>
+        </p:txBody>
+      </p:sp>
+      <p:sp>
+        <p:nvSpPr>
+          <p:cNvPr id="14" name="Shape 12"/>
           <p:cNvSpPr/>
           <p:nvPr/>
         </p:nvSpPr>
@@ -4324,7 +4402,7 @@
       </p:sp>
       <p:sp>
         <p:nvSpPr>
-          <p:cNvPr id="13" name="Text 11"/>
+          <p:cNvPr id="15" name="Text 13"/>
           <p:cNvSpPr txBox="1"/>
           <p:nvPr/>
         </p:nvSpPr>
@@ -4363,7 +4441,7 @@
       </p:sp>
       <p:sp>
         <p:nvSpPr>
-          <p:cNvPr id="14" name="Text 12"/>
+          <p:cNvPr id="16" name="Text 14"/>
           <p:cNvSpPr txBox="1"/>
           <p:nvPr/>
         </p:nvSpPr>
@@ -4587,7 +4665,7 @@
                 <a:ea typeface="Arial" pitchFamily="34" charset="-122"/>
                 <a:cs typeface="Arial" pitchFamily="34" charset="-120"/>
               </a:rPr>
-              <a:t>Live ERCOT MIS ingestion</a:t>
+              <a:t>Auto-refreshing data cache</a:t>
             </a:r>
             <a:endParaRPr lang="en-US" sz="1300" dirty="0"/>
           </a:p>
@@ -4626,7 +4704,7 @@
                 <a:ea typeface="Arial" pitchFamily="34" charset="-122"/>
                 <a:cs typeface="Arial" pitchFamily="34" charset="-120"/>
               </a:rPr>
-              <a:t>Automate authenticated retrieval of NP7-802-M/803-M</a:t>
+              <a:t>Backend caches the real dataset for process lifetime; a new auction month needs a restart to appear</a:t>
             </a:r>
             <a:endParaRPr lang="en-US" sz="1050" dirty="0"/>
           </a:p>
@@ -5103,7 +5181,7 @@
                 <a:ea typeface="Arial" pitchFamily="34" charset="-122"/>
                 <a:cs typeface="Arial" pitchFamily="34" charset="-120"/>
               </a:rPr>
-              <a:t>Time-of-use drill-down in the UI</a:t>
+              <a:t>Link constraints to corridors</a:t>
             </a:r>
             <a:endParaRPr lang="en-US" sz="1300" dirty="0"/>
           </a:p>
@@ -5142,7 +5220,7 @@
                 <a:ea typeface="Arial" pitchFamily="34" charset="-122"/>
                 <a:cs typeface="Arial" pitchFamily="34" charset="-120"/>
               </a:rPr>
-              <a:t>Backend already supports it; expose the filter controls</a:t>
+              <a:t>Binding Constraints is a real, live, searchable list today; connecting a constraint to the specific tracked pair it affects is the next step</a:t>
             </a:r>
             <a:endParaRPr lang="en-US" sz="1050" dirty="0"/>
           </a:p>
@@ -5499,7 +5577,7 @@
                 <a:ea typeface="Consolas" pitchFamily="34" charset="-122"/>
                 <a:cs typeface="Consolas" pitchFamily="34" charset="-120"/>
               </a:rPr>
-              <a:t>Repository: ercot-crr-analytics/  ·  30/30 tests passing  ·  README.md has full setup instructions</a:t>
+              <a:t>Repository: ercot-crr-analytics/  ·  136/136 tests passing  ·  README.md has full setup instructions</a:t>
             </a:r>
             <a:endParaRPr lang="en-US" sz="1250" dirty="0"/>
           </a:p>
@@ -9039,7 +9117,7 @@
                 <a:ea typeface="Arial" pitchFamily="34" charset="-122"/>
                 <a:cs typeface="Arial" pitchFamily="34" charset="-120"/>
               </a:rPr>
-              <a:t>30 backend tests + a real Babel syntax check + a react-test-renderer smoke test on the UI, before this deck existed</a:t>
+              <a:t>136 backend tests, plus every UI change checked live in a real browser against the real backend before being called done</a:t>
             </a:r>
             <a:endParaRPr lang="en-US" sz="1150" dirty="0"/>
           </a:p>
@@ -9142,7 +9220,7 @@
                 <a:ea typeface="Consolas" pitchFamily="34" charset="-122"/>
                 <a:cs typeface="Consolas" pitchFamily="34" charset="-120"/>
               </a:rPr>
-              <a:t>AI WORKFLOW · PROMPT JOURNAL, ENTRY 1</a:t>
+              <a:t>AI WORKFLOW · PROMPT JOURNAL, ENTRIES 1 &amp; 9</a:t>
             </a:r>
             <a:endParaRPr lang="en-US" sz="1200" dirty="0"/>
           </a:p>
@@ -9300,7 +9378,7 @@
         </p:nvSpPr>
         <p:spPr>
           <a:xfrm>
-            <a:off x="548640" y="3108960"/>
+            <a:off x="548640" y="3063240"/>
             <a:ext cx="128016" cy="128016"/>
           </a:xfrm>
           <a:prstGeom prst="ellipse">
@@ -9320,7 +9398,7 @@
         </p:nvSpPr>
         <p:spPr>
           <a:xfrm>
-            <a:off x="868680" y="3063240"/>
+            <a:off x="868680" y="3017520"/>
             <a:ext cx="3017520" cy="685800"/>
           </a:xfrm>
           <a:prstGeom prst="rect">
@@ -9337,7 +9415,7 @@
               <a:buNone/>
             </a:pPr>
             <a:r>
-              <a:rPr lang="en-US" sz="1300" b="1" dirty="0">
+              <a:rPr lang="en-US" sz="1250" b="1" dirty="0">
                 <a:solidFill>
                   <a:srgbClr val="F4F6F9"/>
                 </a:solidFill>
@@ -9347,7 +9425,7 @@
               </a:rPr>
               <a:t>Confirmed real &amp; public</a:t>
             </a:r>
-            <a:endParaRPr lang="en-US" sz="1300" dirty="0"/>
+            <a:endParaRPr lang="en-US" sz="1250" dirty="0"/>
           </a:p>
         </p:txBody>
       </p:sp>
@@ -9359,7 +9437,7 @@
         </p:nvSpPr>
         <p:spPr>
           <a:xfrm>
-            <a:off x="3977640" y="3063240"/>
+            <a:off x="3977640" y="3017520"/>
             <a:ext cx="7680960" cy="685800"/>
           </a:xfrm>
           <a:prstGeom prst="rect">
@@ -9376,7 +9454,7 @@
               <a:buNone/>
             </a:pPr>
             <a:r>
-              <a:rPr lang="en-US" sz="1200" dirty="0">
+              <a:rPr lang="en-US" sz="1150" dirty="0">
                 <a:solidFill>
                   <a:srgbClr val="9AA5B4"/>
                 </a:solidFill>
@@ -9386,7 +9464,7 @@
               </a:rPr>
               <a:t>ERCOT publishes NP7-802-M / NP7-803-M — Source, Sink, CRR type, clearing price, and CRR Account Holder — free on the MIS Public Area.</a:t>
             </a:r>
-            <a:endParaRPr lang="en-US" sz="1200" dirty="0"/>
+            <a:endParaRPr lang="en-US" sz="1150" dirty="0"/>
           </a:p>
         </p:txBody>
       </p:sp>
@@ -9398,7 +9476,7 @@
         </p:nvSpPr>
         <p:spPr>
           <a:xfrm>
-            <a:off x="548640" y="3977640"/>
+            <a:off x="548640" y="3840480"/>
             <a:ext cx="128016" cy="128016"/>
           </a:xfrm>
           <a:prstGeom prst="ellipse">
@@ -9418,7 +9496,7 @@
         </p:nvSpPr>
         <p:spPr>
           <a:xfrm>
-            <a:off x="868680" y="3931920"/>
+            <a:off x="868680" y="3794760"/>
             <a:ext cx="3017520" cy="685800"/>
           </a:xfrm>
           <a:prstGeom prst="rect">
@@ -9435,7 +9513,7 @@
               <a:buNone/>
             </a:pPr>
             <a:r>
-              <a:rPr lang="en-US" sz="1300" b="1" dirty="0">
+              <a:rPr lang="en-US" sz="1250" b="1" dirty="0">
                 <a:solidFill>
                   <a:srgbClr val="F4F6F9"/>
                 </a:solidFill>
@@ -9443,9 +9521,9 @@
                 <a:ea typeface="Arial" pitchFamily="34" charset="-122"/>
                 <a:cs typeface="Arial" pitchFamily="34" charset="-120"/>
               </a:rPr>
-              <a:t>Confirmed not scriptable here</a:t>
-            </a:r>
-            <a:endParaRPr lang="en-US" sz="1300" dirty="0"/>
+              <a:t>First pass: not scriptable here</a:t>
+            </a:r>
+            <a:endParaRPr lang="en-US" sz="1250" dirty="0"/>
           </a:p>
         </p:txBody>
       </p:sp>
@@ -9457,7 +9535,7 @@
         </p:nvSpPr>
         <p:spPr>
           <a:xfrm>
-            <a:off x="3977640" y="3931920"/>
+            <a:off x="3977640" y="3794760"/>
             <a:ext cx="7680960" cy="685800"/>
           </a:xfrm>
           <a:prstGeom prst="rect">
@@ -9474,7 +9552,7 @@
               <a:buNone/>
             </a:pPr>
             <a:r>
-              <a:rPr lang="en-US" sz="1200" dirty="0">
+              <a:rPr lang="en-US" sz="1150" dirty="0">
                 <a:solidFill>
                   <a:srgbClr val="9AA5B4"/>
                 </a:solidFill>
@@ -9482,9 +9560,9 @@
                 <a:ea typeface="Arial" pitchFamily="34" charset="-122"/>
                 <a:cs typeface="Arial" pitchFamily="34" charset="-120"/>
               </a:rPr>
-              <a:t>That download center is a JS-driven, session-gated file browser; a direct fetch returned an empty file list — no stable unauthenticated URL.</a:t>
-            </a:r>
-            <a:endParaRPr lang="en-US" sz="1200" dirty="0"/>
+              <a:t>The modern mis.ercot.com file browser is JS-driven and session-gated; a direct fetch returned an empty file list — no stable unauthenticated URL, so v1 shipped on a labeled synthetic generator instead.</a:t>
+            </a:r>
+            <a:endParaRPr lang="en-US" sz="1150" dirty="0"/>
           </a:p>
         </p:txBody>
       </p:sp>
@@ -9496,7 +9574,7 @@
         </p:nvSpPr>
         <p:spPr>
           <a:xfrm>
-            <a:off x="548640" y="4846320"/>
+            <a:off x="548640" y="4617720"/>
             <a:ext cx="128016" cy="128016"/>
           </a:xfrm>
           <a:prstGeom prst="ellipse">
@@ -9516,7 +9594,7 @@
         </p:nvSpPr>
         <p:spPr>
           <a:xfrm>
-            <a:off x="868680" y="4800600"/>
+            <a:off x="868680" y="4572000"/>
             <a:ext cx="3017520" cy="685800"/>
           </a:xfrm>
           <a:prstGeom prst="rect">
@@ -9533,7 +9611,7 @@
               <a:buNone/>
             </a:pPr>
             <a:r>
-              <a:rPr lang="en-US" sz="1300" b="1" dirty="0">
+              <a:rPr lang="en-US" sz="1250" b="1" dirty="0">
                 <a:solidFill>
                   <a:srgbClr val="F4F6F9"/>
                 </a:solidFill>
@@ -9541,9 +9619,9 @@
                 <a:ea typeface="Arial" pitchFamily="34" charset="-122"/>
                 <a:cs typeface="Arial" pitchFamily="34" charset="-120"/>
               </a:rPr>
-              <a:t>Architecture changed as a result</a:t>
-            </a:r>
-            <a:endParaRPr lang="en-US" sz="1300" dirty="0"/>
+              <a:t>Re-checked later, found the real path</a:t>
+            </a:r>
+            <a:endParaRPr lang="en-US" sz="1250" dirty="0"/>
           </a:p>
         </p:txBody>
       </p:sp>
@@ -9555,7 +9633,7 @@
         </p:nvSpPr>
         <p:spPr>
           <a:xfrm>
-            <a:off x="3977640" y="4800600"/>
+            <a:off x="3977640" y="4572000"/>
             <a:ext cx="7680960" cy="685800"/>
           </a:xfrm>
           <a:prstGeom prst="rect">
@@ -9572,7 +9650,7 @@
               <a:buNone/>
             </a:pPr>
             <a:r>
-              <a:rPr lang="en-US" sz="1200" dirty="0">
+              <a:rPr lang="en-US" sz="1150" dirty="0">
                 <a:solidFill>
                   <a:srgbClr val="9AA5B4"/>
                 </a:solidFill>
@@ -9580,15 +9658,113 @@
                 <a:ea typeface="Arial" pitchFamily="34" charset="-122"/>
                 <a:cs typeface="Arial" pitchFamily="34" charset="-120"/>
               </a:rPr>
-              <a:t>Built a clearly-labeled synthetic generator (real hub names, realistic seasonality) + an ingestion layer written against ERCOT's real column layout, so real CSVs drop in with zero code changes.</a:t>
-            </a:r>
-            <a:endParaRPr lang="en-US" sz="1200" dirty="0"/>
-          </a:p>
-        </p:txBody>
-      </p:sp>
-      <p:sp>
-        <p:nvSpPr>
-          <p:cNvPr id="16" name="Text 14"/>
+              <a:t>A follow-up session tested ERCOT's older, legacy MIS servlet directly with curl instead of trusting the earlier conclusion — reachable, unauthenticated, serving the real files.</a:t>
+            </a:r>
+            <a:endParaRPr lang="en-US" sz="1150" dirty="0"/>
+          </a:p>
+        </p:txBody>
+      </p:sp>
+      <p:sp>
+        <p:nvSpPr>
+          <p:cNvPr id="16" name="Shape 14"/>
+          <p:cNvSpPr/>
+          <p:nvPr/>
+        </p:nvSpPr>
+        <p:spPr>
+          <a:xfrm>
+            <a:off x="548640" y="5394960"/>
+            <a:ext cx="128016" cy="128016"/>
+          </a:xfrm>
+          <a:prstGeom prst="ellipse">
+            <a:avLst/>
+          </a:prstGeom>
+          <a:solidFill>
+            <a:srgbClr val="3DDC97"/>
+          </a:solidFill>
+          <a:ln/>
+        </p:spPr>
+      </p:sp>
+      <p:sp>
+        <p:nvSpPr>
+          <p:cNvPr id="17" name="Text 15"/>
+          <p:cNvSpPr txBox="1"/>
+          <p:nvPr/>
+        </p:nvSpPr>
+        <p:spPr>
+          <a:xfrm>
+            <a:off x="868680" y="5349240"/>
+            <a:ext cx="3017520" cy="685800"/>
+          </a:xfrm>
+          <a:prstGeom prst="rect">
+            <a:avLst/>
+          </a:prstGeom>
+          <a:noFill/>
+          <a:ln/>
+        </p:spPr>
+        <p:txBody>
+          <a:bodyPr wrap="square" lIns="0" tIns="0" rIns="0" bIns="0" rtlCol="0" anchor="ctr"/>
+          <a:lstStyle/>
+          <a:p>
+            <a:pPr indent="0" marL="0">
+              <a:buNone/>
+            </a:pPr>
+            <a:r>
+              <a:rPr lang="en-US" sz="1250" b="1" dirty="0">
+                <a:solidFill>
+                  <a:srgbClr val="F4F6F9"/>
+                </a:solidFill>
+                <a:latin typeface="Arial" pitchFamily="34" charset="0"/>
+                <a:ea typeface="Arial" pitchFamily="34" charset="-122"/>
+                <a:cs typeface="Arial" pitchFamily="34" charset="-120"/>
+              </a:rPr>
+              <a:t>Now the default: 1.1M real records</a:t>
+            </a:r>
+            <a:endParaRPr lang="en-US" sz="1250" dirty="0"/>
+          </a:p>
+        </p:txBody>
+      </p:sp>
+      <p:sp>
+        <p:nvSpPr>
+          <p:cNvPr id="18" name="Text 16"/>
+          <p:cNvSpPr txBox="1"/>
+          <p:nvPr/>
+        </p:nvSpPr>
+        <p:spPr>
+          <a:xfrm>
+            <a:off x="3977640" y="5349240"/>
+            <a:ext cx="7680960" cy="685800"/>
+          </a:xfrm>
+          <a:prstGeom prst="rect">
+            <a:avLst/>
+          </a:prstGeom>
+          <a:noFill/>
+          <a:ln/>
+        </p:spPr>
+        <p:txBody>
+          <a:bodyPr wrap="square" lIns="0" tIns="0" rIns="0" bIns="0" rtlCol="0" anchor="ctr"/>
+          <a:lstStyle/>
+          <a:p>
+            <a:pPr indent="0" marL="0">
+              <a:buNone/>
+            </a:pPr>
+            <a:r>
+              <a:rPr lang="en-US" sz="1150" dirty="0">
+                <a:solidFill>
+                  <a:srgbClr val="9AA5B4"/>
+                </a:solidFill>
+                <a:latin typeface="Arial" pitchFamily="34" charset="0"/>
+                <a:ea typeface="Arial" pitchFamily="34" charset="-122"/>
+                <a:cs typeface="Arial" pitchFamily="34" charset="-120"/>
+              </a:rPr>
+              <a:t>13 months of real CRR Monthly Auction Results and the real 521-company Market Participants List, bundled in this repo — synthetic data is now the fallback, not the default.</a:t>
+            </a:r>
+            <a:endParaRPr lang="en-US" sz="1150" dirty="0"/>
+          </a:p>
+        </p:txBody>
+      </p:sp>
+      <p:sp>
+        <p:nvSpPr>
+          <p:cNvPr id="19" name="Text 17"/>
           <p:cNvSpPr txBox="1"/>
           <p:nvPr/>
         </p:nvSpPr>
@@ -9722,7 +9898,7 @@
                 <a:ea typeface="Georgia" pitchFamily="34" charset="-122"/>
                 <a:cs typeface="Georgia" pitchFamily="34" charset="-120"/>
               </a:rPr>
-              <a:t>One tested core, two ways to see it</a:t>
+              <a:t>One tested core, one real dataset, one console</a:t>
             </a:r>
             <a:endParaRPr lang="en-US" sz="3000" dirty="0"/>
           </a:p>
@@ -9851,7 +10027,7 @@
                 <a:ea typeface="Consolas" pitchFamily="34" charset="-122"/>
                 <a:cs typeface="Consolas" pitchFamily="34" charset="-120"/>
               </a:rPr>
-              <a:t>ERCOT MIS CSVs</a:t>
+              <a:t>1.1M real ERCOT</a:t>
             </a:r>
             <a:endParaRPr lang="en-US" sz="1000" dirty="0"/>
           </a:p>
@@ -9868,7 +10044,7 @@
                 <a:ea typeface="Consolas" pitchFamily="34" charset="-122"/>
                 <a:cs typeface="Consolas" pitchFamily="34" charset="-120"/>
               </a:rPr>
-              <a:t>(if present) or</a:t>
+              <a:t>MIS auction records</a:t>
             </a:r>
             <a:endParaRPr lang="en-US" sz="1000" dirty="0"/>
           </a:p>
@@ -9885,7 +10061,7 @@
                 <a:ea typeface="Consolas" pitchFamily="34" charset="-122"/>
                 <a:cs typeface="Consolas" pitchFamily="34" charset="-120"/>
               </a:rPr>
-              <a:t>seeded synthetic</a:t>
+              <a:t>(bundled) or</a:t>
             </a:r>
             <a:endParaRPr lang="en-US" sz="1000" dirty="0"/>
           </a:p>
@@ -9902,7 +10078,7 @@
                 <a:ea typeface="Consolas" pitchFamily="34" charset="-122"/>
                 <a:cs typeface="Consolas" pitchFamily="34" charset="-120"/>
               </a:rPr>
-              <a:t>generator</a:t>
+              <a:t>synthetic fallback</a:t>
             </a:r>
             <a:endParaRPr lang="en-US" sz="1000" dirty="0"/>
           </a:p>
@@ -10352,7 +10528,7 @@
                 <a:ea typeface="Arial" pitchFamily="34" charset="-122"/>
                 <a:cs typeface="Arial" pitchFamily="34" charset="-120"/>
               </a:rPr>
-              <a:t>React UI</a:t>
+              <a:t>React console</a:t>
             </a:r>
             <a:endParaRPr lang="en-US" sz="1350" dirty="0"/>
           </a:p>
@@ -10408,7 +10584,7 @@
                 <a:ea typeface="Consolas" pitchFamily="34" charset="-122"/>
                 <a:cs typeface="Consolas" pitchFamily="34" charset="-120"/>
               </a:rPr>
-              <a:t>Participants ·</a:t>
+              <a:t>Participants · Signals</a:t>
             </a:r>
             <a:endParaRPr lang="en-US" sz="1000" dirty="0"/>
           </a:p>
@@ -10425,7 +10601,7 @@
                 <a:ea typeface="Consolas" pitchFamily="34" charset="-122"/>
                 <a:cs typeface="Consolas" pitchFamily="34" charset="-120"/>
               </a:rPr>
-              <a:t>Signals</a:t>
+              <a:t>· Binding constraints</a:t>
             </a:r>
             <a:endParaRPr lang="en-US" sz="1000" dirty="0"/>
           </a:p>
@@ -10557,11 +10733,11 @@
         <p:spPr>
           <a:xfrm>
             <a:off x="502920" y="4572000"/>
-            <a:ext cx="10698480" cy="868680"/>
+            <a:ext cx="10698480" cy="640080"/>
           </a:xfrm>
           <a:prstGeom prst="roundRect">
             <a:avLst>
-              <a:gd name="adj" fmla="val 8421"/>
+              <a:gd name="adj" fmla="val 11429"/>
             </a:avLst>
           </a:prstGeom>
           <a:solidFill>
@@ -10584,7 +10760,7 @@
         <p:spPr>
           <a:xfrm>
             <a:off x="822960" y="4572000"/>
-            <a:ext cx="10058400" cy="868680"/>
+            <a:ext cx="10058400" cy="640080"/>
           </a:xfrm>
           <a:prstGeom prst="rect">
             <a:avLst/>
@@ -10608,7 +10784,7 @@
                 <a:ea typeface="Arial" pitchFamily="34" charset="-122"/>
                 <a:cs typeface="Arial" pitchFamily="34" charset="-120"/>
               </a:rPr>
-              <a:t>30 pytest tests exercise the analytics core AND the API layer. The React UI never computes an average, a trend, or a score itself — it only renders what the tested core already produced.</a:t>
+              <a:t>136 pytest tests exercise the analytics core AND the API layer. The React console never computes an average, a trend, or a score itself — it only renders what the tested core already produced.</a:t>
             </a:r>
             <a:endParaRPr lang="en-US" sz="1300" dirty="0"/>
           </a:p>
@@ -10750,7 +10926,7 @@
                 <a:ea typeface="Georgia" pitchFamily="34" charset="-122"/>
                 <a:cs typeface="Georgia" pitchFamily="34" charset="-120"/>
               </a:rPr>
-              <a:t>Four tabs, one dataset</a:t>
+              <a:t>Five pages, one real dataset</a:t>
             </a:r>
             <a:endParaRPr lang="en-US" sz="3000" dirty="0"/>
           </a:p>
@@ -10764,24 +10940,24 @@
         </p:nvSpPr>
         <p:spPr>
           <a:xfrm>
-            <a:off x="548640" y="1737360"/>
-            <a:ext cx="640080" cy="822960"/>
-          </a:xfrm>
-          <a:prstGeom prst="rect">
-            <a:avLst/>
-          </a:prstGeom>
-          <a:noFill/>
-          <a:ln/>
-        </p:spPr>
-        <p:txBody>
-          <a:bodyPr wrap="square" lIns="0" tIns="0" rIns="0" bIns="0" rtlCol="0" anchor="ctr"/>
-          <a:lstStyle/>
-          <a:p>
-            <a:pPr indent="0" marL="0">
-              <a:buNone/>
-            </a:pPr>
-            <a:r>
-              <a:rPr lang="en-US" sz="2400" dirty="0">
+            <a:off x="548640" y="1600200"/>
+            <a:ext cx="640080" cy="685800"/>
+          </a:xfrm>
+          <a:prstGeom prst="rect">
+            <a:avLst/>
+          </a:prstGeom>
+          <a:noFill/>
+          <a:ln/>
+        </p:spPr>
+        <p:txBody>
+          <a:bodyPr wrap="square" lIns="0" tIns="0" rIns="0" bIns="0" rtlCol="0" anchor="ctr"/>
+          <a:lstStyle/>
+          <a:p>
+            <a:pPr indent="0" marL="0">
+              <a:buNone/>
+            </a:pPr>
+            <a:r>
+              <a:rPr lang="en-US" sz="2200" dirty="0">
                 <a:solidFill>
                   <a:srgbClr val="3DDC97"/>
                 </a:solidFill>
@@ -10791,7 +10967,7 @@
               </a:rPr>
               <a:t>01</a:t>
             </a:r>
-            <a:endParaRPr lang="en-US" sz="2400" dirty="0"/>
+            <a:endParaRPr lang="en-US" sz="2200" dirty="0"/>
           </a:p>
         </p:txBody>
       </p:sp>
@@ -10803,24 +10979,24 @@
         </p:nvSpPr>
         <p:spPr>
           <a:xfrm>
-            <a:off x="1371600" y="1755648"/>
-            <a:ext cx="3840480" cy="365760"/>
-          </a:xfrm>
-          <a:prstGeom prst="rect">
-            <a:avLst/>
-          </a:prstGeom>
-          <a:noFill/>
-          <a:ln/>
-        </p:spPr>
-        <p:txBody>
-          <a:bodyPr wrap="square" lIns="0" tIns="0" rIns="0" bIns="0" rtlCol="0" anchor="ctr"/>
-          <a:lstStyle/>
-          <a:p>
-            <a:pPr indent="0" marL="0">
-              <a:buNone/>
-            </a:pPr>
-            <a:r>
-              <a:rPr lang="en-US" sz="1600" b="1" dirty="0">
+            <a:off x="1371600" y="1618488"/>
+            <a:ext cx="3840480" cy="320040"/>
+          </a:xfrm>
+          <a:prstGeom prst="rect">
+            <a:avLst/>
+          </a:prstGeom>
+          <a:noFill/>
+          <a:ln/>
+        </p:spPr>
+        <p:txBody>
+          <a:bodyPr wrap="square" lIns="0" tIns="0" rIns="0" bIns="0" rtlCol="0" anchor="ctr"/>
+          <a:lstStyle/>
+          <a:p>
+            <a:pPr indent="0" marL="0">
+              <a:buNone/>
+            </a:pPr>
+            <a:r>
+              <a:rPr lang="en-US" sz="1550" b="1" dirty="0">
                 <a:solidFill>
                   <a:srgbClr val="F4F6F9"/>
                 </a:solidFill>
@@ -10830,7 +11006,7 @@
               </a:rPr>
               <a:t>Overview</a:t>
             </a:r>
-            <a:endParaRPr lang="en-US" sz="1600" dirty="0"/>
+            <a:endParaRPr lang="en-US" sz="1550" dirty="0"/>
           </a:p>
         </p:txBody>
       </p:sp>
@@ -10842,24 +11018,24 @@
         </p:nvSpPr>
         <p:spPr>
           <a:xfrm>
-            <a:off x="1371600" y="2148840"/>
-            <a:ext cx="9875520" cy="457200"/>
-          </a:xfrm>
-          <a:prstGeom prst="rect">
-            <a:avLst/>
-          </a:prstGeom>
-          <a:noFill/>
-          <a:ln/>
-        </p:spPr>
-        <p:txBody>
-          <a:bodyPr wrap="square" lIns="0" tIns="0" rIns="0" bIns="0" rtlCol="0" anchor="ctr"/>
-          <a:lstStyle/>
-          <a:p>
-            <a:pPr indent="0" marL="0">
-              <a:buNone/>
-            </a:pPr>
-            <a:r>
-              <a:rPr lang="en-US" sz="1250" dirty="0">
+            <a:off x="1371600" y="1965960"/>
+            <a:ext cx="9875520" cy="365760"/>
+          </a:xfrm>
+          <a:prstGeom prst="rect">
+            <a:avLst/>
+          </a:prstGeom>
+          <a:noFill/>
+          <a:ln/>
+        </p:spPr>
+        <p:txBody>
+          <a:bodyPr wrap="square" lIns="0" tIns="0" rIns="0" bIns="0" rtlCol="0" anchor="ctr"/>
+          <a:lstStyle/>
+          <a:p>
+            <a:pPr indent="0" marL="0">
+              <a:buNone/>
+            </a:pPr>
+            <a:r>
+              <a:rPr lang="en-US" sz="1200" dirty="0">
                 <a:solidFill>
                   <a:srgbClr val="9AA5B4"/>
                 </a:solidFill>
@@ -10867,9 +11043,9 @@
                 <a:ea typeface="Arial" pitchFamily="34" charset="-122"/>
                 <a:cs typeface="Arial" pitchFamily="34" charset="-120"/>
               </a:rPr>
-              <a:t>Latest auction month, MW awarded, top opportunity corridors, top participants by notional</a:t>
-            </a:r>
-            <a:endParaRPr lang="en-US" sz="1250" dirty="0"/>
+              <a:t>Latest real auction month, MW awarded, top opportunity corridors, top participants by notional</a:t>
+            </a:r>
+            <a:endParaRPr lang="en-US" sz="1200" dirty="0"/>
           </a:p>
         </p:txBody>
       </p:sp>
@@ -10881,24 +11057,24 @@
         </p:nvSpPr>
         <p:spPr>
           <a:xfrm>
-            <a:off x="548640" y="2743200"/>
-            <a:ext cx="640080" cy="822960"/>
-          </a:xfrm>
-          <a:prstGeom prst="rect">
-            <a:avLst/>
-          </a:prstGeom>
-          <a:noFill/>
-          <a:ln/>
-        </p:spPr>
-        <p:txBody>
-          <a:bodyPr wrap="square" lIns="0" tIns="0" rIns="0" bIns="0" rtlCol="0" anchor="ctr"/>
-          <a:lstStyle/>
-          <a:p>
-            <a:pPr indent="0" marL="0">
-              <a:buNone/>
-            </a:pPr>
-            <a:r>
-              <a:rPr lang="en-US" sz="2400" dirty="0">
+            <a:off x="548640" y="2377440"/>
+            <a:ext cx="640080" cy="685800"/>
+          </a:xfrm>
+          <a:prstGeom prst="rect">
+            <a:avLst/>
+          </a:prstGeom>
+          <a:noFill/>
+          <a:ln/>
+        </p:spPr>
+        <p:txBody>
+          <a:bodyPr wrap="square" lIns="0" tIns="0" rIns="0" bIns="0" rtlCol="0" anchor="ctr"/>
+          <a:lstStyle/>
+          <a:p>
+            <a:pPr indent="0" marL="0">
+              <a:buNone/>
+            </a:pPr>
+            <a:r>
+              <a:rPr lang="en-US" sz="2200" dirty="0">
                 <a:solidFill>
                   <a:srgbClr val="3DDC97"/>
                 </a:solidFill>
@@ -10908,7 +11084,7 @@
               </a:rPr>
               <a:t>02</a:t>
             </a:r>
-            <a:endParaRPr lang="en-US" sz="2400" dirty="0"/>
+            <a:endParaRPr lang="en-US" sz="2200" dirty="0"/>
           </a:p>
         </p:txBody>
       </p:sp>
@@ -10920,24 +11096,24 @@
         </p:nvSpPr>
         <p:spPr>
           <a:xfrm>
-            <a:off x="1371600" y="2761488"/>
-            <a:ext cx="3840480" cy="365760"/>
-          </a:xfrm>
-          <a:prstGeom prst="rect">
-            <a:avLst/>
-          </a:prstGeom>
-          <a:noFill/>
-          <a:ln/>
-        </p:spPr>
-        <p:txBody>
-          <a:bodyPr wrap="square" lIns="0" tIns="0" rIns="0" bIns="0" rtlCol="0" anchor="ctr"/>
-          <a:lstStyle/>
-          <a:p>
-            <a:pPr indent="0" marL="0">
-              <a:buNone/>
-            </a:pPr>
-            <a:r>
-              <a:rPr lang="en-US" sz="1600" b="1" dirty="0">
+            <a:off x="1371600" y="2395728"/>
+            <a:ext cx="3840480" cy="320040"/>
+          </a:xfrm>
+          <a:prstGeom prst="rect">
+            <a:avLst/>
+          </a:prstGeom>
+          <a:noFill/>
+          <a:ln/>
+        </p:spPr>
+        <p:txBody>
+          <a:bodyPr wrap="square" lIns="0" tIns="0" rIns="0" bIns="0" rtlCol="0" anchor="ctr"/>
+          <a:lstStyle/>
+          <a:p>
+            <a:pPr indent="0" marL="0">
+              <a:buNone/>
+            </a:pPr>
+            <a:r>
+              <a:rPr lang="en-US" sz="1550" b="1" dirty="0">
                 <a:solidFill>
                   <a:srgbClr val="F4F6F9"/>
                 </a:solidFill>
@@ -10947,7 +11123,7 @@
               </a:rPr>
               <a:t>Source/Sink Explorer</a:t>
             </a:r>
-            <a:endParaRPr lang="en-US" sz="1600" dirty="0"/>
+            <a:endParaRPr lang="en-US" sz="1550" dirty="0"/>
           </a:p>
         </p:txBody>
       </p:sp>
@@ -10959,24 +11135,24 @@
         </p:nvSpPr>
         <p:spPr>
           <a:xfrm>
-            <a:off x="1371600" y="3154680"/>
-            <a:ext cx="9875520" cy="457200"/>
-          </a:xfrm>
-          <a:prstGeom prst="rect">
-            <a:avLst/>
-          </a:prstGeom>
-          <a:noFill/>
-          <a:ln/>
-        </p:spPr>
-        <p:txBody>
-          <a:bodyPr wrap="square" lIns="0" tIns="0" rIns="0" bIns="0" rtlCol="0" anchor="ctr"/>
-          <a:lstStyle/>
-          <a:p>
-            <a:pPr indent="0" marL="0">
-              <a:buNone/>
-            </a:pPr>
-            <a:r>
-              <a:rPr lang="en-US" sz="1250" dirty="0">
+            <a:off x="1371600" y="2743200"/>
+            <a:ext cx="9875520" cy="365760"/>
+          </a:xfrm>
+          <a:prstGeom prst="rect">
+            <a:avLst/>
+          </a:prstGeom>
+          <a:noFill/>
+          <a:ln/>
+        </p:spPr>
+        <p:txBody>
+          <a:bodyPr wrap="square" lIns="0" tIns="0" rIns="0" bIns="0" rtlCol="0" anchor="ctr"/>
+          <a:lstStyle/>
+          <a:p>
+            <a:pPr indent="0" marL="0">
+              <a:buNone/>
+            </a:pPr>
+            <a:r>
+              <a:rPr lang="en-US" sz="1200" dirty="0">
                 <a:solidFill>
                   <a:srgbClr val="9AA5B4"/>
                 </a:solidFill>
@@ -10984,9 +11160,9 @@
                 <a:ea typeface="Arial" pitchFamily="34" charset="-122"/>
                 <a:cs typeface="Arial" pitchFamily="34" charset="-120"/>
               </a:rPr>
-              <a:t>Pick any of the 15 tracked pairs; see Obligation vs. Option price history and the six analytics metrics</a:t>
-            </a:r>
-            <a:endParaRPr lang="en-US" sz="1250" dirty="0"/>
+              <a:t>Pick any of the 30 tracked corridors (or compare up to 3 at once); Obligation vs. Option price history</a:t>
+            </a:r>
+            <a:endParaRPr lang="en-US" sz="1200" dirty="0"/>
           </a:p>
         </p:txBody>
       </p:sp>
@@ -10998,24 +11174,24 @@
         </p:nvSpPr>
         <p:spPr>
           <a:xfrm>
-            <a:off x="548640" y="3749040"/>
-            <a:ext cx="640080" cy="822960"/>
-          </a:xfrm>
-          <a:prstGeom prst="rect">
-            <a:avLst/>
-          </a:prstGeom>
-          <a:noFill/>
-          <a:ln/>
-        </p:spPr>
-        <p:txBody>
-          <a:bodyPr wrap="square" lIns="0" tIns="0" rIns="0" bIns="0" rtlCol="0" anchor="ctr"/>
-          <a:lstStyle/>
-          <a:p>
-            <a:pPr indent="0" marL="0">
-              <a:buNone/>
-            </a:pPr>
-            <a:r>
-              <a:rPr lang="en-US" sz="2400" dirty="0">
+            <a:off x="548640" y="3154680"/>
+            <a:ext cx="640080" cy="685800"/>
+          </a:xfrm>
+          <a:prstGeom prst="rect">
+            <a:avLst/>
+          </a:prstGeom>
+          <a:noFill/>
+          <a:ln/>
+        </p:spPr>
+        <p:txBody>
+          <a:bodyPr wrap="square" lIns="0" tIns="0" rIns="0" bIns="0" rtlCol="0" anchor="ctr"/>
+          <a:lstStyle/>
+          <a:p>
+            <a:pPr indent="0" marL="0">
+              <a:buNone/>
+            </a:pPr>
+            <a:r>
+              <a:rPr lang="en-US" sz="2200" dirty="0">
                 <a:solidFill>
                   <a:srgbClr val="3DDC97"/>
                 </a:solidFill>
@@ -11025,7 +11201,7 @@
               </a:rPr>
               <a:t>03</a:t>
             </a:r>
-            <a:endParaRPr lang="en-US" sz="2400" dirty="0"/>
+            <a:endParaRPr lang="en-US" sz="2200" dirty="0"/>
           </a:p>
         </p:txBody>
       </p:sp>
@@ -11037,24 +11213,24 @@
         </p:nvSpPr>
         <p:spPr>
           <a:xfrm>
-            <a:off x="1371600" y="3767328"/>
-            <a:ext cx="3840480" cy="365760"/>
-          </a:xfrm>
-          <a:prstGeom prst="rect">
-            <a:avLst/>
-          </a:prstGeom>
-          <a:noFill/>
-          <a:ln/>
-        </p:spPr>
-        <p:txBody>
-          <a:bodyPr wrap="square" lIns="0" tIns="0" rIns="0" bIns="0" rtlCol="0" anchor="ctr"/>
-          <a:lstStyle/>
-          <a:p>
-            <a:pPr indent="0" marL="0">
-              <a:buNone/>
-            </a:pPr>
-            <a:r>
-              <a:rPr lang="en-US" sz="1600" b="1" dirty="0">
+            <a:off x="1371600" y="3172968"/>
+            <a:ext cx="3840480" cy="320040"/>
+          </a:xfrm>
+          <a:prstGeom prst="rect">
+            <a:avLst/>
+          </a:prstGeom>
+          <a:noFill/>
+          <a:ln/>
+        </p:spPr>
+        <p:txBody>
+          <a:bodyPr wrap="square" lIns="0" tIns="0" rIns="0" bIns="0" rtlCol="0" anchor="ctr"/>
+          <a:lstStyle/>
+          <a:p>
+            <a:pPr indent="0" marL="0">
+              <a:buNone/>
+            </a:pPr>
+            <a:r>
+              <a:rPr lang="en-US" sz="1550" b="1" dirty="0">
                 <a:solidFill>
                   <a:srgbClr val="F4F6F9"/>
                 </a:solidFill>
@@ -11064,7 +11240,7 @@
               </a:rPr>
               <a:t>Participants</a:t>
             </a:r>
-            <a:endParaRPr lang="en-US" sz="1600" dirty="0"/>
+            <a:endParaRPr lang="en-US" sz="1550" dirty="0"/>
           </a:p>
         </p:txBody>
       </p:sp>
@@ -11076,24 +11252,24 @@
         </p:nvSpPr>
         <p:spPr>
           <a:xfrm>
-            <a:off x="1371600" y="4160520"/>
-            <a:ext cx="9875520" cy="457200"/>
-          </a:xfrm>
-          <a:prstGeom prst="rect">
-            <a:avLst/>
-          </a:prstGeom>
-          <a:noFill/>
-          <a:ln/>
-        </p:spPr>
-        <p:txBody>
-          <a:bodyPr wrap="square" lIns="0" tIns="0" rIns="0" bIns="0" rtlCol="0" anchor="ctr"/>
-          <a:lstStyle/>
-          <a:p>
-            <a:pPr indent="0" marL="0">
-              <a:buNone/>
-            </a:pPr>
-            <a:r>
-              <a:rPr lang="en-US" sz="1250" dirty="0">
+            <a:off x="1371600" y="3520440"/>
+            <a:ext cx="9875520" cy="365760"/>
+          </a:xfrm>
+          <a:prstGeom prst="rect">
+            <a:avLst/>
+          </a:prstGeom>
+          <a:noFill/>
+          <a:ln/>
+        </p:spPr>
+        <p:txBody>
+          <a:bodyPr wrap="square" lIns="0" tIns="0" rIns="0" bIns="0" rtlCol="0" anchor="ctr"/>
+          <a:lstStyle/>
+          <a:p>
+            <a:pPr indent="0" marL="0">
+              <a:buNone/>
+            </a:pPr>
+            <a:r>
+              <a:rPr lang="en-US" sz="1200" dirty="0">
                 <a:solidFill>
                   <a:srgbClr val="9AA5B4"/>
                 </a:solidFill>
@@ -11101,9 +11277,9 @@
                 <a:ea typeface="Arial" pitchFamily="34" charset="-122"/>
                 <a:cs typeface="Arial" pitchFamily="34" charset="-120"/>
               </a:rPr>
-              <a:t>Sort by notional or MW; drill into any participant's trailing-36-month activity and pair footprint</a:t>
-            </a:r>
-            <a:endParaRPr lang="en-US" sz="1250" dirty="0"/>
+              <a:t>Search 377 real CRR Account Holders; drill into any participant's recent certificate-level activity</a:t>
+            </a:r>
+            <a:endParaRPr lang="en-US" sz="1200" dirty="0"/>
           </a:p>
         </p:txBody>
       </p:sp>
@@ -11115,24 +11291,24 @@
         </p:nvSpPr>
         <p:spPr>
           <a:xfrm>
-            <a:off x="548640" y="4754880"/>
-            <a:ext cx="640080" cy="822960"/>
-          </a:xfrm>
-          <a:prstGeom prst="rect">
-            <a:avLst/>
-          </a:prstGeom>
-          <a:noFill/>
-          <a:ln/>
-        </p:spPr>
-        <p:txBody>
-          <a:bodyPr wrap="square" lIns="0" tIns="0" rIns="0" bIns="0" rtlCol="0" anchor="ctr"/>
-          <a:lstStyle/>
-          <a:p>
-            <a:pPr indent="0" marL="0">
-              <a:buNone/>
-            </a:pPr>
-            <a:r>
-              <a:rPr lang="en-US" sz="2400" dirty="0">
+            <a:off x="548640" y="3931920"/>
+            <a:ext cx="640080" cy="685800"/>
+          </a:xfrm>
+          <a:prstGeom prst="rect">
+            <a:avLst/>
+          </a:prstGeom>
+          <a:noFill/>
+          <a:ln/>
+        </p:spPr>
+        <p:txBody>
+          <a:bodyPr wrap="square" lIns="0" tIns="0" rIns="0" bIns="0" rtlCol="0" anchor="ctr"/>
+          <a:lstStyle/>
+          <a:p>
+            <a:pPr indent="0" marL="0">
+              <a:buNone/>
+            </a:pPr>
+            <a:r>
+              <a:rPr lang="en-US" sz="2200" dirty="0">
                 <a:solidFill>
                   <a:srgbClr val="3DDC97"/>
                 </a:solidFill>
@@ -11142,7 +11318,7 @@
               </a:rPr>
               <a:t>04</a:t>
             </a:r>
-            <a:endParaRPr lang="en-US" sz="2400" dirty="0"/>
+            <a:endParaRPr lang="en-US" sz="2200" dirty="0"/>
           </a:p>
         </p:txBody>
       </p:sp>
@@ -11154,24 +11330,24 @@
         </p:nvSpPr>
         <p:spPr>
           <a:xfrm>
-            <a:off x="1371600" y="4773168"/>
-            <a:ext cx="3840480" cy="365760"/>
-          </a:xfrm>
-          <a:prstGeom prst="rect">
-            <a:avLst/>
-          </a:prstGeom>
-          <a:noFill/>
-          <a:ln/>
-        </p:spPr>
-        <p:txBody>
-          <a:bodyPr wrap="square" lIns="0" tIns="0" rIns="0" bIns="0" rtlCol="0" anchor="ctr"/>
-          <a:lstStyle/>
-          <a:p>
-            <a:pPr indent="0" marL="0">
-              <a:buNone/>
-            </a:pPr>
-            <a:r>
-              <a:rPr lang="en-US" sz="1600" b="1" dirty="0">
+            <a:off x="1371600" y="3950208"/>
+            <a:ext cx="3840480" cy="320040"/>
+          </a:xfrm>
+          <a:prstGeom prst="rect">
+            <a:avLst/>
+          </a:prstGeom>
+          <a:noFill/>
+          <a:ln/>
+        </p:spPr>
+        <p:txBody>
+          <a:bodyPr wrap="square" lIns="0" tIns="0" rIns="0" bIns="0" rtlCol="0" anchor="ctr"/>
+          <a:lstStyle/>
+          <a:p>
+            <a:pPr indent="0" marL="0">
+              <a:buNone/>
+            </a:pPr>
+            <a:r>
+              <a:rPr lang="en-US" sz="1550" b="1" dirty="0">
                 <a:solidFill>
                   <a:srgbClr val="F4F6F9"/>
                 </a:solidFill>
@@ -11181,7 +11357,7 @@
               </a:rPr>
               <a:t>Opportunity Signals</a:t>
             </a:r>
-            <a:endParaRPr lang="en-US" sz="1600" dirty="0"/>
+            <a:endParaRPr lang="en-US" sz="1550" dirty="0"/>
           </a:p>
         </p:txBody>
       </p:sp>
@@ -11193,24 +11369,24 @@
         </p:nvSpPr>
         <p:spPr>
           <a:xfrm>
-            <a:off x="1371600" y="5166360"/>
-            <a:ext cx="9875520" cy="457200"/>
-          </a:xfrm>
-          <a:prstGeom prst="rect">
-            <a:avLst/>
-          </a:prstGeom>
-          <a:noFill/>
-          <a:ln/>
-        </p:spPr>
-        <p:txBody>
-          <a:bodyPr wrap="square" lIns="0" tIns="0" rIns="0" bIns="0" rtlCol="0" anchor="ctr"/>
-          <a:lstStyle/>
-          <a:p>
-            <a:pPr indent="0" marL="0">
-              <a:buNone/>
-            </a:pPr>
-            <a:r>
-              <a:rPr lang="en-US" sz="1250" dirty="0">
+            <a:off x="1371600" y="4297680"/>
+            <a:ext cx="9875520" cy="365760"/>
+          </a:xfrm>
+          <a:prstGeom prst="rect">
+            <a:avLst/>
+          </a:prstGeom>
+          <a:noFill/>
+          <a:ln/>
+        </p:spPr>
+        <p:txBody>
+          <a:bodyPr wrap="square" lIns="0" tIns="0" rIns="0" bIns="0" rtlCol="0" anchor="ctr"/>
+          <a:lstStyle/>
+          <a:p>
+            <a:pPr indent="0" marL="0">
+              <a:buNone/>
+            </a:pPr>
+            <a:r>
+              <a:rPr lang="en-US" sz="1200" dirty="0">
                 <a:solidFill>
                   <a:srgbClr val="9AA5B4"/>
                 </a:solidFill>
@@ -11218,9 +11394,9 @@
                 <a:ea typeface="Arial" pitchFamily="34" charset="-122"/>
                 <a:cs typeface="Arial" pitchFamily="34" charset="-120"/>
               </a:rPr>
-              <a:t>Every pair's Low/Medium/High score with its four factor sub-scores and plain-language explanation</a:t>
-            </a:r>
-            <a:endParaRPr lang="en-US" sz="1250" dirty="0"/>
+              <a:t>Every corridor's Low/Medium/High score with its four factor sub-scores and plain-language explanation</a:t>
+            </a:r>
+            <a:endParaRPr lang="en-US" sz="1200" dirty="0"/>
           </a:p>
         </p:txBody>
       </p:sp>
@@ -11232,31 +11408,148 @@
         </p:nvSpPr>
         <p:spPr>
           <a:xfrm>
-            <a:off x="502920" y="5806440"/>
-            <a:ext cx="10972800" cy="365760"/>
-          </a:xfrm>
-          <a:prstGeom prst="rect">
-            <a:avLst/>
-          </a:prstGeom>
-          <a:noFill/>
-          <a:ln/>
-        </p:spPr>
-        <p:txBody>
-          <a:bodyPr wrap="square" lIns="0" tIns="0" rIns="0" bIns="0" rtlCol="0" anchor="ctr"/>
-          <a:lstStyle/>
-          <a:p>
-            <a:pPr algn="ctr" indent="0" marL="0">
-              <a:buNone/>
-            </a:pPr>
-            <a:r>
-              <a:rPr lang="en-US" sz="1100" dirty="0">
-                <a:solidFill>
-                  <a:srgbClr val="7A8699"/>
+            <a:off x="548640" y="4709160"/>
+            <a:ext cx="640080" cy="685800"/>
+          </a:xfrm>
+          <a:prstGeom prst="rect">
+            <a:avLst/>
+          </a:prstGeom>
+          <a:noFill/>
+          <a:ln/>
+        </p:spPr>
+        <p:txBody>
+          <a:bodyPr wrap="square" lIns="0" tIns="0" rIns="0" bIns="0" rtlCol="0" anchor="ctr"/>
+          <a:lstStyle/>
+          <a:p>
+            <a:pPr indent="0" marL="0">
+              <a:buNone/>
+            </a:pPr>
+            <a:r>
+              <a:rPr lang="en-US" sz="2200" dirty="0">
+                <a:solidFill>
+                  <a:srgbClr val="3DDC97"/>
                 </a:solidFill>
                 <a:latin typeface="Consolas" pitchFamily="34" charset="0"/>
                 <a:ea typeface="Consolas" pitchFamily="34" charset="-122"/>
                 <a:cs typeface="Consolas" pitchFamily="34" charset="-120"/>
               </a:rPr>
+              <a:t>05</a:t>
+            </a:r>
+            <a:endParaRPr lang="en-US" sz="2200" dirty="0"/>
+          </a:p>
+        </p:txBody>
+      </p:sp>
+      <p:sp>
+        <p:nvSpPr>
+          <p:cNvPr id="17" name="Text 15"/>
+          <p:cNvSpPr txBox="1"/>
+          <p:nvPr/>
+        </p:nvSpPr>
+        <p:spPr>
+          <a:xfrm>
+            <a:off x="1371600" y="4727448"/>
+            <a:ext cx="3840480" cy="320040"/>
+          </a:xfrm>
+          <a:prstGeom prst="rect">
+            <a:avLst/>
+          </a:prstGeom>
+          <a:noFill/>
+          <a:ln/>
+        </p:spPr>
+        <p:txBody>
+          <a:bodyPr wrap="square" lIns="0" tIns="0" rIns="0" bIns="0" rtlCol="0" anchor="ctr"/>
+          <a:lstStyle/>
+          <a:p>
+            <a:pPr indent="0" marL="0">
+              <a:buNone/>
+            </a:pPr>
+            <a:r>
+              <a:rPr lang="en-US" sz="1550" b="1" dirty="0">
+                <a:solidFill>
+                  <a:srgbClr val="F4F6F9"/>
+                </a:solidFill>
+                <a:latin typeface="Arial" pitchFamily="34" charset="0"/>
+                <a:ea typeface="Arial" pitchFamily="34" charset="-122"/>
+                <a:cs typeface="Arial" pitchFamily="34" charset="-120"/>
+              </a:rPr>
+              <a:t>Binding Constraints</a:t>
+            </a:r>
+            <a:endParaRPr lang="en-US" sz="1550" dirty="0"/>
+          </a:p>
+        </p:txBody>
+      </p:sp>
+      <p:sp>
+        <p:nvSpPr>
+          <p:cNvPr id="18" name="Text 16"/>
+          <p:cNvSpPr txBox="1"/>
+          <p:nvPr/>
+        </p:nvSpPr>
+        <p:spPr>
+          <a:xfrm>
+            <a:off x="1371600" y="5074920"/>
+            <a:ext cx="9875520" cy="365760"/>
+          </a:xfrm>
+          <a:prstGeom prst="rect">
+            <a:avLst/>
+          </a:prstGeom>
+          <a:noFill/>
+          <a:ln/>
+        </p:spPr>
+        <p:txBody>
+          <a:bodyPr wrap="square" lIns="0" tIns="0" rIns="0" bIns="0" rtlCol="0" anchor="ctr"/>
+          <a:lstStyle/>
+          <a:p>
+            <a:pPr indent="0" marL="0">
+              <a:buNone/>
+            </a:pPr>
+            <a:r>
+              <a:rPr lang="en-US" sz="1200" dirty="0">
+                <a:solidFill>
+                  <a:srgbClr val="9AA5B4"/>
+                </a:solidFill>
+                <a:latin typeface="Arial" pitchFamily="34" charset="0"/>
+                <a:ea typeface="Arial" pitchFamily="34" charset="-122"/>
+                <a:cs typeface="Arial" pitchFamily="34" charset="-120"/>
+              </a:rPr>
+              <a:t>Live ERCOT transmission constraints right now — a separate, real-time clock from the settled auction data</a:t>
+            </a:r>
+            <a:endParaRPr lang="en-US" sz="1200" dirty="0"/>
+          </a:p>
+        </p:txBody>
+      </p:sp>
+      <p:sp>
+        <p:nvSpPr>
+          <p:cNvPr id="19" name="Text 17"/>
+          <p:cNvSpPr txBox="1"/>
+          <p:nvPr/>
+        </p:nvSpPr>
+        <p:spPr>
+          <a:xfrm>
+            <a:off x="502920" y="5760720"/>
+            <a:ext cx="10972800" cy="365760"/>
+          </a:xfrm>
+          <a:prstGeom prst="rect">
+            <a:avLst/>
+          </a:prstGeom>
+          <a:noFill/>
+          <a:ln/>
+        </p:spPr>
+        <p:txBody>
+          <a:bodyPr wrap="square" lIns="0" tIns="0" rIns="0" bIns="0" rtlCol="0" anchor="ctr"/>
+          <a:lstStyle/>
+          <a:p>
+            <a:pPr algn="ctr" indent="0" marL="0">
+              <a:buNone/>
+            </a:pPr>
+            <a:r>
+              <a:rPr lang="en-US" sz="1100" dirty="0">
+                <a:solidFill>
+                  <a:srgbClr val="7A8699"/>
+                </a:solidFill>
+                <a:latin typeface="Consolas" pitchFamily="34" charset="0"/>
+                <a:ea typeface="Consolas" pitchFamily="34" charset="-122"/>
+                <a:cs typeface="Consolas" pitchFamily="34" charset="-120"/>
+              </a:rPr>
               <a:t>[ SWITCH TO LIVE APPLICATION — return here only if the connection drops ]</a:t>
             </a:r>
             <a:endParaRPr lang="en-US" sz="1100" dirty="0"/>
@@ -11265,7 +11558,7 @@
       </p:sp>
       <p:sp>
         <p:nvSpPr>
-          <p:cNvPr id="17" name="Text 15"/>
+          <p:cNvPr id="20" name="Text 18"/>
           <p:cNvSpPr txBox="1"/>
           <p:nvPr/>
         </p:nvSpPr>

--- a/presentation/ERCOT_CRR_Capstone_Presentation.pptx
+++ b/presentation/ERCOT_CRR_Capstone_Presentation.pptx
@@ -2998,7 +2998,7 @@
                 <a:ea typeface="Consolas" pitchFamily="34" charset="-122"/>
                 <a:cs typeface="Consolas" pitchFamily="34" charset="-120"/>
               </a:rPr>
-              <a:t>DEMO FALLBACK · OPPORTUNITY SIGNALS</a:t>
+              <a:t>DEMO FALLBACK · LEGACY AUCTION-BASED SIGNAL</a:t>
             </a:r>
             <a:endParaRPr lang="en-US" sz="1200" dirty="0"/>
           </a:p>
@@ -3043,15 +3043,54 @@
           </a:p>
         </p:txBody>
       </p:sp>
+      <p:sp>
+        <p:nvSpPr>
+          <p:cNvPr id="4" name="Text 2"/>
+          <p:cNvSpPr txBox="1"/>
+          <p:nvPr/>
+        </p:nvSpPr>
+        <p:spPr>
+          <a:xfrm>
+            <a:off x="502920" y="1371600"/>
+            <a:ext cx="10972800" cy="274320"/>
+          </a:xfrm>
+          <a:prstGeom prst="rect">
+            <a:avLst/>
+          </a:prstGeom>
+          <a:noFill/>
+          <a:ln/>
+        </p:spPr>
+        <p:txBody>
+          <a:bodyPr wrap="square" lIns="0" tIns="0" rIns="0" bIns="0" rtlCol="0" anchor="ctr"/>
+          <a:lstStyle/>
+          <a:p>
+            <a:pPr indent="0" marL="0">
+              <a:buNone/>
+            </a:pPr>
+            <a:r>
+              <a:rPr lang="en-US" sz="1150" i="1" dirty="0">
+                <a:solidFill>
+                  <a:srgbClr val="7A8699"/>
+                </a:solidFill>
+                <a:latin typeface="Arial" pitchFamily="34" charset="0"/>
+                <a:ea typeface="Arial" pitchFamily="34" charset="-122"/>
+                <a:cs typeface="Arial" pitchFamily="34" charset="-120"/>
+              </a:rPr>
+              <a:t>Demoted to a secondary signal on the Path Settlements page — real ERCOT settlement value is the primary one now.</a:t>
+            </a:r>
+            <a:endParaRPr lang="en-US" sz="1150" dirty="0"/>
+          </a:p>
+        </p:txBody>
+      </p:sp>
       <p:graphicFrame>
         <p:nvGraphicFramePr>
-          <p:cNvPr id="4" name="Chart 0" descr=""/>
+          <p:cNvPr id="5" name="Chart 0" descr=""/>
           <p:cNvGraphicFramePr/>
           <p:nvPr/>
         </p:nvGraphicFramePr>
         <p:xfrm>
-          <a:off x="502920" y="1600200"/>
-          <a:ext cx="11155680" cy="3931920"/>
+          <a:off x="502920" y="1874520"/>
+          <a:ext cx="11155680" cy="3657600"/>
         </p:xfrm>
         <a:graphic xmlns:a="http://schemas.openxmlformats.org/drawingml/2006/main">
           <a:graphicData uri="http://schemas.openxmlformats.org/drawingml/2006/chart">
@@ -3061,7 +3100,7 @@
       </p:graphicFrame>
       <p:sp>
         <p:nvSpPr>
-          <p:cNvPr id="5" name="Text 2"/>
+          <p:cNvPr id="6" name="Text 3"/>
           <p:cNvSpPr txBox="1"/>
           <p:nvPr/>
         </p:nvSpPr>
@@ -3100,7 +3139,7 @@
       </p:sp>
       <p:sp>
         <p:nvSpPr>
-          <p:cNvPr id="6" name="Text 3"/>
+          <p:cNvPr id="7" name="Text 4"/>
           <p:cNvSpPr txBox="1"/>
           <p:nvPr/>
         </p:nvSpPr>
@@ -3494,7 +3533,7 @@
                 <a:ea typeface="Arial" pitchFamily="34" charset="-122"/>
                 <a:cs typeface="Arial" pitchFamily="34" charset="-120"/>
               </a:rPr>
-              <a:t>136/136 backend tests pass</a:t>
+              <a:t>192/192 backend tests pass</a:t>
             </a:r>
             <a:endParaRPr lang="en-US" sz="1500" dirty="0"/>
           </a:p>
@@ -5577,7 +5616,7 @@
                 <a:ea typeface="Consolas" pitchFamily="34" charset="-122"/>
                 <a:cs typeface="Consolas" pitchFamily="34" charset="-120"/>
               </a:rPr>
-              <a:t>Repository: ercot-crr-analytics/  ·  136/136 tests passing  ·  README.md has full setup instructions</a:t>
+              <a:t>Repository: ercot-crr-analytics/  ·  192/192 tests passing  ·  README.md has full setup instructions</a:t>
             </a:r>
             <a:endParaRPr lang="en-US" sz="1250" dirty="0"/>
           </a:p>
@@ -6148,7 +6187,7 @@
                 <a:ea typeface="Arial" pitchFamily="34" charset="-122"/>
                 <a:cs typeface="Arial" pitchFamily="34" charset="-120"/>
               </a:rPr>
-              <a:t>Dashboard → Explorer → Participants → Opportunity Signals</a:t>
+              <a:t>Overview → Explorer → Participants → Path Settlements → Binding Constraints</a:t>
             </a:r>
             <a:endParaRPr lang="en-US" sz="1250" dirty="0"/>
           </a:p>
@@ -9117,7 +9156,7 @@
                 <a:ea typeface="Arial" pitchFamily="34" charset="-122"/>
                 <a:cs typeface="Arial" pitchFamily="34" charset="-120"/>
               </a:rPr>
-              <a:t>136 backend tests, plus every UI change checked live in a real browser against the real backend before being called done</a:t>
+              <a:t>192 backend tests, plus every UI change checked live in a real browser against the real backend before being called done</a:t>
             </a:r>
             <a:endParaRPr lang="en-US" sz="1150" dirty="0"/>
           </a:p>
@@ -10404,7 +10443,7 @@
                 <a:ea typeface="Consolas" pitchFamily="34" charset="-122"/>
                 <a:cs typeface="Consolas" pitchFamily="34" charset="-120"/>
               </a:rPr>
-              <a:t>/api/pairs</a:t>
+              <a:t>/api/participants</a:t>
             </a:r>
             <a:endParaRPr lang="en-US" sz="1000" dirty="0"/>
           </a:p>
@@ -10421,7 +10460,7 @@
                 <a:ea typeface="Consolas" pitchFamily="34" charset="-122"/>
                 <a:cs typeface="Consolas" pitchFamily="34" charset="-120"/>
               </a:rPr>
-              <a:t>/api/participants</a:t>
+              <a:t>/api/live/binding-</a:t>
             </a:r>
             <a:endParaRPr lang="en-US" sz="1000" dirty="0"/>
           </a:p>
@@ -10438,7 +10477,7 @@
                 <a:ea typeface="Consolas" pitchFamily="34" charset="-122"/>
                 <a:cs typeface="Consolas" pitchFamily="34" charset="-120"/>
               </a:rPr>
-              <a:t>/api/opportunity-scores</a:t>
+              <a:t>constraints</a:t>
             </a:r>
             <a:endParaRPr lang="en-US" sz="1000" dirty="0"/>
           </a:p>
@@ -10784,7 +10823,7 @@
                 <a:ea typeface="Arial" pitchFamily="34" charset="-122"/>
                 <a:cs typeface="Arial" pitchFamily="34" charset="-120"/>
               </a:rPr>
-              <a:t>136 pytest tests exercise the analytics core AND the API layer. The React console never computes an average, a trend, or a score itself — it only renders what the tested core already produced.</a:t>
+              <a:t>192 pytest tests exercise the analytics core AND the API layer. The React console never computes an average, a trend, or a score itself — it only renders what the tested core already produced.</a:t>
             </a:r>
             <a:endParaRPr lang="en-US" sz="1300" dirty="0"/>
           </a:p>
@@ -11043,7 +11082,7 @@
                 <a:ea typeface="Arial" pitchFamily="34" charset="-122"/>
                 <a:cs typeface="Arial" pitchFamily="34" charset="-120"/>
               </a:rPr>
-              <a:t>Latest real auction month, MW awarded, top opportunity corridors, top participants by notional</a:t>
+              <a:t>Latest real auction month, MW awarded, hot paths by notional, top participants</a:t>
             </a:r>
             <a:endParaRPr lang="en-US" sz="1200" dirty="0"/>
           </a:p>
@@ -11160,7 +11199,7 @@
                 <a:ea typeface="Arial" pitchFamily="34" charset="-122"/>
                 <a:cs typeface="Arial" pitchFamily="34" charset="-120"/>
               </a:rPr>
-              <a:t>Pick any of the 30 tracked corridors (or compare up to 3 at once); Obligation vs. Option price history</a:t>
+              <a:t>Pick any of the 30 tracked corridors (or compare up to 3 at once); Obligation vs. Option auction price history</a:t>
             </a:r>
             <a:endParaRPr lang="en-US" sz="1200" dirty="0"/>
           </a:p>
@@ -11277,7 +11316,7 @@
                 <a:ea typeface="Arial" pitchFamily="34" charset="-122"/>
                 <a:cs typeface="Arial" pitchFamily="34" charset="-120"/>
               </a:rPr>
-              <a:t>Search 377 real CRR Account Holders; drill into any participant's recent certificate-level activity</a:t>
+              <a:t>Search 377 real CRR Account Holders; certificates, strict CRR-type filtering, and real settlement value by participant/path</a:t>
             </a:r>
             <a:endParaRPr lang="en-US" sz="1200" dirty="0"/>
           </a:p>
@@ -11355,7 +11394,7 @@
                 <a:ea typeface="Arial" pitchFamily="34" charset="-122"/>
                 <a:cs typeface="Arial" pitchFamily="34" charset="-120"/>
               </a:rPr>
-              <a:t>Opportunity Signals</a:t>
+              <a:t>Path Settlements</a:t>
             </a:r>
             <a:endParaRPr lang="en-US" sz="1550" dirty="0"/>
           </a:p>
@@ -11394,7 +11433,7 @@
                 <a:ea typeface="Arial" pitchFamily="34" charset="-122"/>
                 <a:cs typeface="Arial" pitchFamily="34" charset="-120"/>
               </a:rPr>
-              <a:t>Every corridor's Low/Medium/High score with its four factor sub-scores and plain-language explanation</a:t>
+              <a:t>How each path actually settled — real ERCOT Day-Ahead SPPs (Sink minus Source), not the auction price; the legacy Low/Medium/High auction-based score is kept as one demoted line, not deleted</a:t>
             </a:r>
             <a:endParaRPr lang="en-US" sz="1200" dirty="0"/>
           </a:p>
@@ -11511,7 +11550,7 @@
                 <a:ea typeface="Arial" pitchFamily="34" charset="-122"/>
                 <a:cs typeface="Arial" pitchFamily="34" charset="-120"/>
               </a:rPr>
-              <a:t>Live ERCOT transmission constraints right now — a separate, real-time clock from the settled auction data</a:t>
+              <a:t>Live ERCOT transmission constraints right now — a separate, real-time clock from the settled auction data, real shadow prices with no invented severity label</a:t>
             </a:r>
             <a:endParaRPr lang="en-US" sz="1200" dirty="0"/>
           </a:p>
